--- a/eCatalog_Agent_Architecture_v2.pptx
+++ b/eCatalog_Agent_Architecture_v2.pptx
@@ -7,7 +7,7 @@
   <p:sldIdLst>
     <p:sldId id="256" r:id="rId7"/>
   </p:sldIdLst>
-  <p:sldSz cx="12188952" cy="6858000" type="screen4x3"/>
+  <p:sldSz cx="11887200" cy="9130855" type="screen4x3"/>
   <p:notesSz cx="6858000" cy="9144000"/>
   <p:defaultTextStyle>
     <a:defPPr>
@@ -3096,43 +3096,9 @@
         <p:nvPr/>
       </p:nvGrpSpPr>
       <p:grpSpPr/>
-      <p:sp>
-        <p:nvSpPr>
-          <p:cNvPr id="2" name="TextBox 1"/>
-          <p:cNvSpPr txBox="1"/>
-          <p:nvPr/>
-        </p:nvSpPr>
-        <p:spPr>
-          <a:xfrm>
-            <a:off x="457200" y="137160"/>
-            <a:ext cx="11274552" cy="457200"/>
-          </a:xfrm>
-          <a:prstGeom prst="rect">
-            <a:avLst/>
-          </a:prstGeom>
-          <a:noFill/>
-        </p:spPr>
-        <p:txBody>
-          <a:bodyPr wrap="none">
-            <a:spAutoFit/>
-          </a:bodyPr>
-          <a:lstStyle/>
-          <a:p>
-            <a:pPr algn="ctr"/>
-            <a:r>
-              <a:rPr sz="2000" b="1">
-                <a:solidFill>
-                  <a:srgbClr val="1A1A2E"/>
-                </a:solidFill>
-              </a:rPr>
-              <a:t>eCatalog Agent — 시스템 아키텍처</a:t>
-            </a:r>
-          </a:p>
-        </p:txBody>
-      </p:sp>
       <p:pic>
         <p:nvPicPr>
-          <p:cNvPr id="3" name="Picture 2" descr="diagram.png"/>
+          <p:cNvPr id="2" name="Picture 1" descr="diagram_full.png"/>
           <p:cNvPicPr>
             <a:picLocks noChangeAspect="1"/>
           </p:cNvPicPr>
@@ -3146,8 +3112,8 @@
         </p:blipFill>
         <p:spPr>
           <a:xfrm>
-            <a:off x="274320" y="685800"/>
-            <a:ext cx="11640312" cy="5943600"/>
+            <a:off x="0" y="0"/>
+            <a:ext cx="11887200" cy="9130855"/>
           </a:xfrm>
           <a:prstGeom prst="rect">
             <a:avLst/>
